--- a/classes/parte-6-analisis-de-malware/147-ofuscacion-packing-y-unpacking/clase-147-presentacion.pptx
+++ b/classes/parte-6-analisis-de-malware/147-ofuscacion-packing-y-unpacking/clase-147-presentacion.pptx
@@ -17,6 +17,9 @@
     <p:sldId id="265" r:id="rId16"/>
     <p:sldId id="266" r:id="rId17"/>
     <p:sldId id="267" r:id="rId18"/>
+    <p:sldId id="268" r:id="rId19"/>
+    <p:sldId id="269" r:id="rId20"/>
+    <p:sldId id="270" r:id="rId21"/>
   </p:sldIdLst>
   <p:sldSz cx="9144000" cy="6858000" type="screen4x3"/>
   <p:notesSz cx="6858000" cy="9144000"/>
@@ -3198,7 +3201,7 @@
                   <a:srgbClr val="0B3D2E"/>
                 </a:solidFill>
               </a:rPr>
-              <a:t>⚠️ Errores comunes</a:t>
+              <a:t>✍️ Ejercicios</a:t>
             </a:r>
           </a:p>
         </p:txBody>
@@ -3236,67 +3239,82 @@
                   <a:srgbClr val="22282E"/>
                 </a:solidFill>
               </a:rPr>
-              <a:t>•  El proceso se cierra al depurar — Anti-debug activo; usa ScyllaHide y evita detección</a:t>
-            </a:r>
-          </a:p>
-          <a:p>
-            <a:pPr>
-              <a:spcAft>
-                <a:spcPts val="600"/>
-              </a:spcAft>
-            </a:pPr>
-            <a:r>
-              <a:rPr sz="1500">
-                <a:solidFill>
-                  <a:srgbClr val="22282E"/>
-                </a:solidFill>
-              </a:rPr>
-              <a:t>•  Dump no ejecuta / IAT rota — Falta reparar imports; usa Scylla IAT Autosearch + Fix</a:t>
-            </a:r>
-          </a:p>
-          <a:p>
-            <a:pPr>
-              <a:spcAft>
-                <a:spcPts val="600"/>
-              </a:spcAft>
-            </a:pPr>
-            <a:r>
-              <a:rPr sz="1500">
-                <a:solidFill>
-                  <a:srgbClr val="22282E"/>
-                </a:solidFill>
-              </a:rPr>
-              <a:t>•  No encuentro el OEP — Usa breakpoints en VirtualProtect/tension entre secciones</a:t>
-            </a:r>
-          </a:p>
-          <a:p>
-            <a:pPr>
-              <a:spcAft>
-                <a:spcPts val="600"/>
-              </a:spcAft>
-            </a:pPr>
-            <a:r>
-              <a:rPr sz="1500">
-                <a:solidFill>
-                  <a:srgbClr val="22282E"/>
-                </a:solidFill>
-              </a:rPr>
-              <a:t>•  upx -d falla — UPX modificado a mano; desempaca manualmente</a:t>
-            </a:r>
-          </a:p>
-          <a:p>
-            <a:pPr>
-              <a:spcAft>
-                <a:spcPts val="600"/>
-              </a:spcAft>
-            </a:pPr>
-            <a:r>
-              <a:rPr sz="1500">
-                <a:solidFill>
-                  <a:srgbClr val="22282E"/>
-                </a:solidFill>
-              </a:rPr>
-              <a:t>•  Dump sin strings — Detuviste antes del OEP; avanza hasta que se descifre todo</a:t>
+              <a:t>•  Explica por qué un binario empaquetado muestra pocos strings e imports.</a:t>
+            </a:r>
+          </a:p>
+          <a:p>
+            <a:pPr>
+              <a:spcAft>
+                <a:spcPts val="600"/>
+              </a:spcAft>
+            </a:pPr>
+            <a:r>
+              <a:rPr sz="1500">
+                <a:solidFill>
+                  <a:srgbClr val="22282E"/>
+                </a:solidFill>
+              </a:rPr>
+              <a:t>•  Compara unpacking automático vs manual: cuándo usar cada uno.</a:t>
+            </a:r>
+          </a:p>
+          <a:p>
+            <a:pPr>
+              <a:spcAft>
+                <a:spcPts val="600"/>
+              </a:spcAft>
+            </a:pPr>
+            <a:r>
+              <a:rPr sz="1500">
+                <a:solidFill>
+                  <a:srgbClr val="22282E"/>
+                </a:solidFill>
+              </a:rPr>
+              <a:t>•  Identifica el OEP en un ejemplo y justifica tu decisión.</a:t>
+            </a:r>
+          </a:p>
+          <a:p>
+            <a:pPr>
+              <a:spcAft>
+                <a:spcPts val="600"/>
+              </a:spcAft>
+            </a:pPr>
+            <a:r>
+              <a:rPr sz="1500">
+                <a:solidFill>
+                  <a:srgbClr val="22282E"/>
+                </a:solidFill>
+              </a:rPr>
+              <a:t>•  Enumera 4 técnicas anti-debug y cómo las neutraliza ScyllaHide.</a:t>
+            </a:r>
+          </a:p>
+          <a:p>
+            <a:pPr>
+              <a:spcAft>
+                <a:spcPts val="600"/>
+              </a:spcAft>
+            </a:pPr>
+            <a:r>
+              <a:rPr sz="1500">
+                <a:solidFill>
+                  <a:srgbClr val="22282E"/>
+                </a:solidFill>
+              </a:rPr>
+              <a:t>•  Reconstruye la IAT de un dump y verifica que Ghidra resuelve nombres.</a:t>
+            </a:r>
+          </a:p>
+          <a:p>
+            <a:pPr>
+              <a:spcAft>
+                <a:spcPts val="600"/>
+              </a:spcAft>
+            </a:pPr>
+            <a:r>
+              <a:rPr sz="1500">
+                <a:solidFill>
+                  <a:srgbClr val="22282E"/>
+                </a:solidFill>
+              </a:rPr>
+              <a:t>•  Investiga por qué VMProtect/Themida requieren otras técnicas.</a:t>
             </a:r>
           </a:p>
         </p:txBody>
@@ -3347,7 +3365,7 @@
                   <a:srgbClr val="0B3D2E"/>
                 </a:solidFill>
               </a:rPr>
-              <a:t>❓ Preguntas frecuentes</a:t>
+              <a:t>📝 Reto verificable</a:t>
             </a:r>
           </a:p>
         </p:txBody>
@@ -3385,37 +3403,22 @@
                   <a:srgbClr val="22282E"/>
                 </a:solidFill>
               </a:rPr>
-              <a:t>•  ❓ ¿Todo malware está empaquetado? No todo, pero es muy común para evadir AV y análisis. La alta entropía y la IAT mínima son las primeras señales.</a:t>
-            </a:r>
-          </a:p>
-          <a:p>
-            <a:pPr>
-              <a:spcAft>
-                <a:spcPts val="600"/>
-              </a:spcAft>
-            </a:pPr>
-            <a:r>
-              <a:rPr sz="1500">
-                <a:solidFill>
-                  <a:srgbClr val="22282E"/>
-                </a:solidFill>
-              </a:rPr>
-              <a:t>•  ❓ ¿Puedo evitar ejecutar para desempacar? Para packers simples sí (estático/emulación). Para packers reales suele hacer falta ejecutar el stub bajo control; por eso el aislamiento es crítico.</a:t>
-            </a:r>
-          </a:p>
-          <a:p>
-            <a:pPr>
-              <a:spcAft>
-                <a:spcPts val="600"/>
-              </a:spcAft>
-            </a:pPr>
-            <a:r>
-              <a:rPr sz="1500">
-                <a:solidFill>
-                  <a:srgbClr val="22282E"/>
-                </a:solidFill>
-              </a:rPr>
-              <a:t>•  ❓ ¿Qué hago con Themida/VMProtect? Son protecciones de virtualización; el unpacking clásico no basta. Se recurre a emulación, dumping parcial y análisis de comportamiento.</a:t>
+              <a:t>•  Desempaca una muestra empaquetada y entrega el dump reparado con su IAT reconstruida, más un informe con el OEP, el método y evidencia de que el código ya es legible (strings/imports visibles).</a:t>
+            </a:r>
+          </a:p>
+          <a:p>
+            <a:pPr>
+              <a:spcAft>
+                <a:spcPts val="600"/>
+              </a:spcAft>
+            </a:pPr>
+            <a:r>
+              <a:rPr sz="1500">
+                <a:solidFill>
+                  <a:srgbClr val="22282E"/>
+                </a:solidFill>
+              </a:rPr>
+              <a:t>•  Criterio de aceptación: el dump abre en Ghidra mostrando imports resueltos y strings que no eran visibles en el binario original, y el informe indica el OEP con su dirección.</a:t>
             </a:r>
           </a:p>
         </p:txBody>
@@ -3466,7 +3469,7 @@
                   <a:srgbClr val="0B3D2E"/>
                 </a:solidFill>
               </a:rPr>
-              <a:t>🔗 Referencias</a:t>
+              <a:t>⚠️ Errores comunes</a:t>
             </a:r>
           </a:p>
         </p:txBody>
@@ -3504,6 +3507,274 @@
                   <a:srgbClr val="22282E"/>
                 </a:solidFill>
               </a:rPr>
+              <a:t>•  El proceso se cierra al depurar — Anti-debug activo; usa ScyllaHide y evita detección</a:t>
+            </a:r>
+          </a:p>
+          <a:p>
+            <a:pPr>
+              <a:spcAft>
+                <a:spcPts val="600"/>
+              </a:spcAft>
+            </a:pPr>
+            <a:r>
+              <a:rPr sz="1500">
+                <a:solidFill>
+                  <a:srgbClr val="22282E"/>
+                </a:solidFill>
+              </a:rPr>
+              <a:t>•  Dump no ejecuta / IAT rota — Falta reparar imports; usa Scylla IAT Autosearch + Fix</a:t>
+            </a:r>
+          </a:p>
+          <a:p>
+            <a:pPr>
+              <a:spcAft>
+                <a:spcPts val="600"/>
+              </a:spcAft>
+            </a:pPr>
+            <a:r>
+              <a:rPr sz="1500">
+                <a:solidFill>
+                  <a:srgbClr val="22282E"/>
+                </a:solidFill>
+              </a:rPr>
+              <a:t>•  No encuentro el OEP — Usa breakpoints en VirtualProtect/tension entre secciones</a:t>
+            </a:r>
+          </a:p>
+          <a:p>
+            <a:pPr>
+              <a:spcAft>
+                <a:spcPts val="600"/>
+              </a:spcAft>
+            </a:pPr>
+            <a:r>
+              <a:rPr sz="1500">
+                <a:solidFill>
+                  <a:srgbClr val="22282E"/>
+                </a:solidFill>
+              </a:rPr>
+              <a:t>•  upx -d falla — UPX modificado a mano; desempaca manualmente</a:t>
+            </a:r>
+          </a:p>
+          <a:p>
+            <a:pPr>
+              <a:spcAft>
+                <a:spcPts val="600"/>
+              </a:spcAft>
+            </a:pPr>
+            <a:r>
+              <a:rPr sz="1500">
+                <a:solidFill>
+                  <a:srgbClr val="22282E"/>
+                </a:solidFill>
+              </a:rPr>
+              <a:t>•  Dump sin strings — Detuviste antes del OEP; avanza hasta que se descifre todo</a:t>
+            </a:r>
+          </a:p>
+        </p:txBody>
+      </p:sp>
+    </p:spTree>
+  </p:cSld>
+  <p:clrMapOvr>
+    <a:masterClrMapping/>
+  </p:clrMapOvr>
+</p:sld>
+</file>
+
+<file path=ppt/slides/slide13.xml><?xml version="1.0" encoding="utf-8"?>
+<p:sld xmlns:a="http://schemas.openxmlformats.org/drawingml/2006/main" xmlns:p="http://schemas.openxmlformats.org/presentationml/2006/main" xmlns:r="http://schemas.openxmlformats.org/officeDocument/2006/relationships">
+  <p:cSld>
+    <p:spTree>
+      <p:nvGrpSpPr>
+        <p:cNvPr id="1" name=""/>
+        <p:cNvGrpSpPr/>
+        <p:nvPr/>
+      </p:nvGrpSpPr>
+      <p:grpSpPr/>
+      <p:sp>
+        <p:nvSpPr>
+          <p:cNvPr id="2" name="TextBox 1"/>
+          <p:cNvSpPr txBox="1"/>
+          <p:nvPr/>
+        </p:nvSpPr>
+        <p:spPr>
+          <a:xfrm>
+            <a:off x="457200" y="320040"/>
+            <a:ext cx="8229600" cy="822960"/>
+          </a:xfrm>
+          <a:prstGeom prst="rect">
+            <a:avLst/>
+          </a:prstGeom>
+          <a:noFill/>
+        </p:spPr>
+        <p:txBody>
+          <a:bodyPr wrap="square">
+            <a:spAutoFit/>
+          </a:bodyPr>
+          <a:lstStyle/>
+          <a:p>
+            <a:r>
+              <a:rPr sz="2600" b="1">
+                <a:solidFill>
+                  <a:srgbClr val="0B3D2E"/>
+                </a:solidFill>
+              </a:rPr>
+              <a:t>❓ Preguntas frecuentes</a:t>
+            </a:r>
+          </a:p>
+        </p:txBody>
+      </p:sp>
+      <p:sp>
+        <p:nvSpPr>
+          <p:cNvPr id="3" name="TextBox 2"/>
+          <p:cNvSpPr txBox="1"/>
+          <p:nvPr/>
+        </p:nvSpPr>
+        <p:spPr>
+          <a:xfrm>
+            <a:off x="457200" y="1280160"/>
+            <a:ext cx="8229600" cy="4937760"/>
+          </a:xfrm>
+          <a:prstGeom prst="rect">
+            <a:avLst/>
+          </a:prstGeom>
+          <a:noFill/>
+        </p:spPr>
+        <p:txBody>
+          <a:bodyPr wrap="square">
+            <a:spAutoFit/>
+          </a:bodyPr>
+          <a:lstStyle/>
+          <a:p>
+            <a:pPr>
+              <a:spcAft>
+                <a:spcPts val="600"/>
+              </a:spcAft>
+            </a:pPr>
+            <a:r>
+              <a:rPr sz="1500">
+                <a:solidFill>
+                  <a:srgbClr val="22282E"/>
+                </a:solidFill>
+              </a:rPr>
+              <a:t>•  ❓ ¿Todo malware está empaquetado? No todo, pero es muy común para evadir AV y análisis. La alta entropía y la IAT mínima son las primeras señales.</a:t>
+            </a:r>
+          </a:p>
+          <a:p>
+            <a:pPr>
+              <a:spcAft>
+                <a:spcPts val="600"/>
+              </a:spcAft>
+            </a:pPr>
+            <a:r>
+              <a:rPr sz="1500">
+                <a:solidFill>
+                  <a:srgbClr val="22282E"/>
+                </a:solidFill>
+              </a:rPr>
+              <a:t>•  ❓ ¿Puedo evitar ejecutar para desempacar? Para packers simples sí (estático/emulación). Para packers reales suele hacer falta ejecutar el stub bajo control; por eso el aislamiento es crítico.</a:t>
+            </a:r>
+          </a:p>
+          <a:p>
+            <a:pPr>
+              <a:spcAft>
+                <a:spcPts val="600"/>
+              </a:spcAft>
+            </a:pPr>
+            <a:r>
+              <a:rPr sz="1500">
+                <a:solidFill>
+                  <a:srgbClr val="22282E"/>
+                </a:solidFill>
+              </a:rPr>
+              <a:t>•  ❓ ¿Qué hago con Themida/VMProtect? Son protecciones de virtualización; el unpacking clásico no basta. Se recurre a emulación, dumping parcial y análisis de comportamiento.</a:t>
+            </a:r>
+          </a:p>
+        </p:txBody>
+      </p:sp>
+    </p:spTree>
+  </p:cSld>
+  <p:clrMapOvr>
+    <a:masterClrMapping/>
+  </p:clrMapOvr>
+</p:sld>
+</file>
+
+<file path=ppt/slides/slide14.xml><?xml version="1.0" encoding="utf-8"?>
+<p:sld xmlns:a="http://schemas.openxmlformats.org/drawingml/2006/main" xmlns:p="http://schemas.openxmlformats.org/presentationml/2006/main" xmlns:r="http://schemas.openxmlformats.org/officeDocument/2006/relationships">
+  <p:cSld>
+    <p:spTree>
+      <p:nvGrpSpPr>
+        <p:cNvPr id="1" name=""/>
+        <p:cNvGrpSpPr/>
+        <p:nvPr/>
+      </p:nvGrpSpPr>
+      <p:grpSpPr/>
+      <p:sp>
+        <p:nvSpPr>
+          <p:cNvPr id="2" name="TextBox 1"/>
+          <p:cNvSpPr txBox="1"/>
+          <p:nvPr/>
+        </p:nvSpPr>
+        <p:spPr>
+          <a:xfrm>
+            <a:off x="457200" y="320040"/>
+            <a:ext cx="8229600" cy="822960"/>
+          </a:xfrm>
+          <a:prstGeom prst="rect">
+            <a:avLst/>
+          </a:prstGeom>
+          <a:noFill/>
+        </p:spPr>
+        <p:txBody>
+          <a:bodyPr wrap="square">
+            <a:spAutoFit/>
+          </a:bodyPr>
+          <a:lstStyle/>
+          <a:p>
+            <a:r>
+              <a:rPr sz="2600" b="1">
+                <a:solidFill>
+                  <a:srgbClr val="0B3D2E"/>
+                </a:solidFill>
+              </a:rPr>
+              <a:t>🔗 Referencias</a:t>
+            </a:r>
+          </a:p>
+        </p:txBody>
+      </p:sp>
+      <p:sp>
+        <p:nvSpPr>
+          <p:cNvPr id="3" name="TextBox 2"/>
+          <p:cNvSpPr txBox="1"/>
+          <p:nvPr/>
+        </p:nvSpPr>
+        <p:spPr>
+          <a:xfrm>
+            <a:off x="457200" y="1280160"/>
+            <a:ext cx="8229600" cy="4937760"/>
+          </a:xfrm>
+          <a:prstGeom prst="rect">
+            <a:avLst/>
+          </a:prstGeom>
+          <a:noFill/>
+        </p:spPr>
+        <p:txBody>
+          <a:bodyPr wrap="square">
+            <a:spAutoFit/>
+          </a:bodyPr>
+          <a:lstStyle/>
+          <a:p>
+            <a:pPr>
+              <a:spcAft>
+                <a:spcPts val="600"/>
+              </a:spcAft>
+            </a:pPr>
+            <a:r>
+              <a:rPr sz="1500">
+                <a:solidFill>
+                  <a:srgbClr val="22282E"/>
+                </a:solidFill>
+              </a:rPr>
               <a:t>•  Sikorski &amp; Honig, Practical Malware Analysis, cap. 18 (packers y unpacking).</a:t>
             </a:r>
           </a:p>
@@ -3569,6 +3840,81 @@
           </a:p>
         </p:txBody>
       </p:sp>
+    </p:spTree>
+  </p:cSld>
+  <p:clrMapOvr>
+    <a:masterClrMapping/>
+  </p:clrMapOvr>
+</p:sld>
+</file>
+
+<file path=ppt/slides/slide15.xml><?xml version="1.0" encoding="utf-8"?>
+<p:sld xmlns:a="http://schemas.openxmlformats.org/drawingml/2006/main" xmlns:p="http://schemas.openxmlformats.org/presentationml/2006/main" xmlns:r="http://schemas.openxmlformats.org/officeDocument/2006/relationships">
+  <p:cSld>
+    <p:spTree>
+      <p:nvGrpSpPr>
+        <p:cNvPr id="1" name=""/>
+        <p:cNvGrpSpPr/>
+        <p:nvPr/>
+      </p:nvGrpSpPr>
+      <p:grpSpPr/>
+      <p:sp>
+        <p:nvSpPr>
+          <p:cNvPr id="2" name="TextBox 1"/>
+          <p:cNvSpPr txBox="1"/>
+          <p:nvPr/>
+        </p:nvSpPr>
+        <p:spPr>
+          <a:xfrm>
+            <a:off x="457200" y="274320"/>
+            <a:ext cx="8229600" cy="640080"/>
+          </a:xfrm>
+          <a:prstGeom prst="rect">
+            <a:avLst/>
+          </a:prstGeom>
+          <a:noFill/>
+        </p:spPr>
+        <p:txBody>
+          <a:bodyPr wrap="square">
+            <a:spAutoFit/>
+          </a:bodyPr>
+          <a:lstStyle/>
+          <a:p>
+            <a:r>
+              <a:rPr sz="2200" b="1">
+                <a:solidFill>
+                  <a:srgbClr val="0B3D2E"/>
+                </a:solidFill>
+              </a:rPr>
+              <a:t>Diagrama de la clase</a:t>
+            </a:r>
+          </a:p>
+        </p:txBody>
+      </p:sp>
+      <p:pic>
+        <p:nvPicPr>
+          <p:cNvPr id="3" name="Picture 2" descr="303369310f4a04eb.png"/>
+          <p:cNvPicPr>
+            <a:picLocks noChangeAspect="1"/>
+          </p:cNvPicPr>
+          <p:nvPr/>
+        </p:nvPicPr>
+        <p:blipFill>
+          <a:blip r:embed="rId2"/>
+          <a:stretch>
+            <a:fillRect/>
+          </a:stretch>
+        </p:blipFill>
+        <p:spPr>
+          <a:xfrm>
+            <a:off x="3484372" y="1097280"/>
+            <a:ext cx="2175255" cy="5303520"/>
+          </a:xfrm>
+          <a:prstGeom prst="rect">
+            <a:avLst/>
+          </a:prstGeom>
+        </p:spPr>
+      </p:pic>
     </p:spTree>
   </p:cSld>
   <p:clrMapOvr>
@@ -3653,7 +3999,7 @@
                   <a:srgbClr val="22282E"/>
                 </a:solidFill>
               </a:rPr>
-              <a:t>•  Vencer las defensas que el malware usa contra el análisis. El alumno aprenderá a reconocer ofuscación, packing y anti-análisis; a identificar el packer; y a desempacar la muestra (automática y manualmente) para hacer un dump del código real desde memoria, reconstruir la IAT y continuar el análisis.</a:t>
+              <a:t>•  Vencer las defensas que el malware usa contra el análisis. El alumno aprenderá a reconocer ofuscación, packing y anti-análisis; a identificar el packer; y a desempacar la muestra (automática y…</a:t>
             </a:r>
           </a:p>
         </p:txBody>
@@ -4047,7 +4393,7 @@
                   <a:srgbClr val="0B3D2E"/>
                 </a:solidFill>
               </a:rPr>
-              <a:t>📖 Definiciones y características</a:t>
+              <a:t>🧠 Explicación en profundidad</a:t>
             </a:r>
           </a:p>
         </p:txBody>
@@ -4085,82 +4431,97 @@
                   <a:srgbClr val="22282E"/>
                 </a:solidFill>
               </a:rPr>
-              <a:t>•  Packer: comprime/cifra el binario y añade un stub que lo restaura en memoria. Característica clave: código real oculto en disco.</a:t>
-            </a:r>
-          </a:p>
-          <a:p>
-            <a:pPr>
-              <a:spcAft>
-                <a:spcPts val="600"/>
-              </a:spcAft>
-            </a:pPr>
-            <a:r>
-              <a:rPr sz="1500">
-                <a:solidFill>
-                  <a:srgbClr val="22282E"/>
-                </a:solidFill>
-              </a:rPr>
-              <a:t>•  OEP: primera instrucción del programa original tras el stub. Característica clave: punto de dump.</a:t>
-            </a:r>
-          </a:p>
-          <a:p>
-            <a:pPr>
-              <a:spcAft>
-                <a:spcPts val="600"/>
-              </a:spcAft>
-            </a:pPr>
-            <a:r>
-              <a:rPr sz="1500">
-                <a:solidFill>
-                  <a:srgbClr val="22282E"/>
-                </a:solidFill>
-              </a:rPr>
-              <a:t>•  Dumping: volcar la imagen desempacada desde memoria. Característica clave: recupera el código real.</a:t>
-            </a:r>
-          </a:p>
-          <a:p>
-            <a:pPr>
-              <a:spcAft>
-                <a:spcPts val="600"/>
-              </a:spcAft>
-            </a:pPr>
-            <a:r>
-              <a:rPr sz="1500">
-                <a:solidFill>
-                  <a:srgbClr val="22282E"/>
-                </a:solidFill>
-              </a:rPr>
-              <a:t>•  IAT rebuild: reconstruir imports tras el dump. Característica clave: binario analizable.</a:t>
-            </a:r>
-          </a:p>
-          <a:p>
-            <a:pPr>
-              <a:spcAft>
-                <a:spcPts val="600"/>
-              </a:spcAft>
-            </a:pPr>
-            <a:r>
-              <a:rPr sz="1500">
-                <a:solidFill>
-                  <a:srgbClr val="22282E"/>
-                </a:solidFill>
-              </a:rPr>
-              <a:t>•  Anti-debug: técnicas para detectar depuradores (IsDebuggerPresent, timing). Característica clave: frena el análisis dinámico.</a:t>
-            </a:r>
-          </a:p>
-          <a:p>
-            <a:pPr>
-              <a:spcAft>
-                <a:spcPts val="600"/>
-              </a:spcAft>
-            </a:pPr>
-            <a:r>
-              <a:rPr sz="1500">
-                <a:solidFill>
-                  <a:srgbClr val="22282E"/>
-                </a:solidFill>
-              </a:rPr>
-              <a:t>•  Virtualización (VMProtect/Themida): convierte código en bytecode propio. Característica clave: unpacking muy difícil.</a:t>
+              <a:t>•  La inmensa mayoría del malware real llega empaquetado (packed): su código real está comprimido o</a:t>
+            </a:r>
+          </a:p>
+          <a:p>
+            <a:pPr>
+              <a:spcAft>
+                <a:spcPts val="600"/>
+              </a:spcAft>
+            </a:pPr>
+            <a:r>
+              <a:rPr sz="1500">
+                <a:solidFill>
+                  <a:srgbClr val="22282E"/>
+                </a:solidFill>
+              </a:rPr>
+              <a:t>•  cifrado, y el fichero solo contiene un pequeño desempaquetador (stub) que, al ejecutarse,</a:t>
+            </a:r>
+          </a:p>
+          <a:p>
+            <a:pPr>
+              <a:spcAft>
+                <a:spcPts val="600"/>
+              </a:spcAft>
+            </a:pPr>
+            <a:r>
+              <a:rPr sz="1500">
+                <a:solidFill>
+                  <a:srgbClr val="22282E"/>
+                </a:solidFill>
+              </a:rPr>
+              <a:t>•  reconstruye el código en memoria y salta a él (Clase 135). El packing sirve dos propósitos al</a:t>
+            </a:r>
+          </a:p>
+          <a:p>
+            <a:pPr>
+              <a:spcAft>
+                <a:spcPts val="600"/>
+              </a:spcAft>
+            </a:pPr>
+            <a:r>
+              <a:rPr sz="1500">
+                <a:solidFill>
+                  <a:srgbClr val="22282E"/>
+                </a:solidFill>
+              </a:rPr>
+              <a:t>•  atacante: evadir la detección por firmas (el antivirus no ve el código malicioso, solo el stub) y</a:t>
+            </a:r>
+          </a:p>
+          <a:p>
+            <a:pPr>
+              <a:spcAft>
+                <a:spcPts val="600"/>
+              </a:spcAft>
+            </a:pPr>
+            <a:r>
+              <a:rPr sz="1500">
+                <a:solidFill>
+                  <a:srgbClr val="22282E"/>
+                </a:solidFill>
+              </a:rPr>
+              <a:t>•  dificultar el análisis estático. La consecuencia para el analista es que hasta que no se</a:t>
+            </a:r>
+          </a:p>
+          <a:p>
+            <a:pPr>
+              <a:spcAft>
+                <a:spcPts val="600"/>
+              </a:spcAft>
+            </a:pPr>
+            <a:r>
+              <a:rPr sz="1500">
+                <a:solidFill>
+                  <a:srgbClr val="22282E"/>
+                </a:solidFill>
+              </a:rPr>
+              <a:t>•  desempaqueta, el análisis estático ve poco o nada —strings cifradas, IAT mínima, una sola sección de</a:t>
+            </a:r>
+          </a:p>
+          <a:p>
+            <a:pPr>
+              <a:spcAft>
+                <a:spcPts val="600"/>
+              </a:spcAft>
+            </a:pPr>
+            <a:r>
+              <a:rPr sz="1500">
+                <a:solidFill>
+                  <a:srgbClr val="22282E"/>
+                </a:solidFill>
+              </a:rPr>
+              <a:t>•  entropía alta—. Desempaquetar (unpacking) es, por tanto, un paso previo obligatorio para la</a:t>
             </a:r>
           </a:p>
         </p:txBody>
@@ -4211,7 +4572,7 @@
                   <a:srgbClr val="0B3D2E"/>
                 </a:solidFill>
               </a:rPr>
-              <a:t>🧰 Herramientas y preparación</a:t>
+              <a:t>📖 Definiciones y características</a:t>
             </a:r>
           </a:p>
         </p:txBody>
@@ -4249,52 +4610,82 @@
                   <a:srgbClr val="22282E"/>
                 </a:solidFill>
               </a:rPr>
-              <a:t>•  Detect It Easy / PEiD para identificar packer.</a:t>
-            </a:r>
-          </a:p>
-          <a:p>
-            <a:pPr>
-              <a:spcAft>
-                <a:spcPts val="600"/>
-              </a:spcAft>
-            </a:pPr>
-            <a:r>
-              <a:rPr sz="1500">
-                <a:solidFill>
-                  <a:srgbClr val="22282E"/>
-                </a:solidFill>
-              </a:rPr>
-              <a:t>•  UPX (upx -d) para packers conocidos.</a:t>
-            </a:r>
-          </a:p>
-          <a:p>
-            <a:pPr>
-              <a:spcAft>
-                <a:spcPts val="600"/>
-              </a:spcAft>
-            </a:pPr>
-            <a:r>
-              <a:rPr sz="1500">
-                <a:solidFill>
-                  <a:srgbClr val="22282E"/>
-                </a:solidFill>
-              </a:rPr>
-              <a:t>•  x64dbg con plugins Scylla (dump + IAT) y ScyllaHide (anti-anti-debug).</a:t>
-            </a:r>
-          </a:p>
-          <a:p>
-            <a:pPr>
-              <a:spcAft>
-                <a:spcPts val="600"/>
-              </a:spcAft>
-            </a:pPr>
-            <a:r>
-              <a:rPr sz="1500">
-                <a:solidFill>
-                  <a:srgbClr val="22282E"/>
-                </a:solidFill>
-              </a:rPr>
-              <a:t>•  PE-bear para revisar el resultado; Ghidra para continuar el análisis.</a:t>
+              <a:t>•  Packer: comprime/cifra el binario y añade un stub que lo restaura en memoria. Característica clave: código real oculto en disco.</a:t>
+            </a:r>
+          </a:p>
+          <a:p>
+            <a:pPr>
+              <a:spcAft>
+                <a:spcPts val="600"/>
+              </a:spcAft>
+            </a:pPr>
+            <a:r>
+              <a:rPr sz="1500">
+                <a:solidFill>
+                  <a:srgbClr val="22282E"/>
+                </a:solidFill>
+              </a:rPr>
+              <a:t>•  OEP: primera instrucción del programa original tras el stub. Característica clave: punto de dump.</a:t>
+            </a:r>
+          </a:p>
+          <a:p>
+            <a:pPr>
+              <a:spcAft>
+                <a:spcPts val="600"/>
+              </a:spcAft>
+            </a:pPr>
+            <a:r>
+              <a:rPr sz="1500">
+                <a:solidFill>
+                  <a:srgbClr val="22282E"/>
+                </a:solidFill>
+              </a:rPr>
+              <a:t>•  Dumping: volcar la imagen desempacada desde memoria. Característica clave: recupera el código real.</a:t>
+            </a:r>
+          </a:p>
+          <a:p>
+            <a:pPr>
+              <a:spcAft>
+                <a:spcPts val="600"/>
+              </a:spcAft>
+            </a:pPr>
+            <a:r>
+              <a:rPr sz="1500">
+                <a:solidFill>
+                  <a:srgbClr val="22282E"/>
+                </a:solidFill>
+              </a:rPr>
+              <a:t>•  IAT rebuild: reconstruir imports tras el dump. Característica clave: binario analizable.</a:t>
+            </a:r>
+          </a:p>
+          <a:p>
+            <a:pPr>
+              <a:spcAft>
+                <a:spcPts val="600"/>
+              </a:spcAft>
+            </a:pPr>
+            <a:r>
+              <a:rPr sz="1500">
+                <a:solidFill>
+                  <a:srgbClr val="22282E"/>
+                </a:solidFill>
+              </a:rPr>
+              <a:t>•  Anti-debug: técnicas para detectar depuradores (IsDebuggerPresent, timing). Característica clave: frena el análisis dinámico.</a:t>
+            </a:r>
+          </a:p>
+          <a:p>
+            <a:pPr>
+              <a:spcAft>
+                <a:spcPts val="600"/>
+              </a:spcAft>
+            </a:pPr>
+            <a:r>
+              <a:rPr sz="1500">
+                <a:solidFill>
+                  <a:srgbClr val="22282E"/>
+                </a:solidFill>
+              </a:rPr>
+              <a:t>•  Virtualización (VMProtect/Themida): convierte código en bytecode propio. Característica clave: unpacking muy difícil.</a:t>
             </a:r>
           </a:p>
         </p:txBody>
@@ -4345,7 +4736,7 @@
                   <a:srgbClr val="0B3D2E"/>
                 </a:solidFill>
               </a:rPr>
-              <a:t>🧪 Laboratorio guiado</a:t>
+              <a:t>📔 Glosario</a:t>
             </a:r>
           </a:p>
         </p:txBody>
@@ -4383,97 +4774,97 @@
                   <a:srgbClr val="22282E"/>
                 </a:solidFill>
               </a:rPr>
-              <a:t>•  Caso A — packer conocido (UPX):</a:t>
-            </a:r>
-          </a:p>
-          <a:p>
-            <a:pPr>
-              <a:spcAft>
-                <a:spcPts val="600"/>
-              </a:spcAft>
-            </a:pPr>
-            <a:r>
-              <a:rPr sz="1500">
-                <a:solidFill>
-                  <a:srgbClr val="22282E"/>
-                </a:solidFill>
-              </a:rPr>
-              <a:t>•  Confirma con DIE que la muestra está empaquetada con UPX.</a:t>
-            </a:r>
-          </a:p>
-          <a:p>
-            <a:pPr>
-              <a:spcAft>
-                <a:spcPts val="600"/>
-              </a:spcAft>
-            </a:pPr>
-            <a:r>
-              <a:rPr sz="1500">
-                <a:solidFill>
-                  <a:srgbClr val="22282E"/>
-                </a:solidFill>
-              </a:rPr>
-              <a:t>•  Desempaca: upx -d muestra.exe -o muestraunpacked.exe.</a:t>
-            </a:r>
-          </a:p>
-          <a:p>
-            <a:pPr>
-              <a:spcAft>
-                <a:spcPts val="600"/>
-              </a:spcAft>
-            </a:pPr>
-            <a:r>
-              <a:rPr sz="1500">
-                <a:solidFill>
-                  <a:srgbClr val="22282E"/>
-                </a:solidFill>
-              </a:rPr>
-              <a:t>•  Verifica en PE-bear que la IAT y las secciones vuelven a ser normales y reanaliza en Ghidra.</a:t>
-            </a:r>
-          </a:p>
-          <a:p>
-            <a:pPr>
-              <a:spcAft>
-                <a:spcPts val="600"/>
-              </a:spcAft>
-            </a:pPr>
-            <a:r>
-              <a:rPr sz="1500">
-                <a:solidFill>
-                  <a:srgbClr val="22282E"/>
-                </a:solidFill>
-              </a:rPr>
-              <a:t>•  Caso B — unpacking manual genérico:</a:t>
-            </a:r>
-          </a:p>
-          <a:p>
-            <a:pPr>
-              <a:spcAft>
-                <a:spcPts val="600"/>
-              </a:spcAft>
-            </a:pPr>
-            <a:r>
-              <a:rPr sz="1500">
-                <a:solidFill>
-                  <a:srgbClr val="22282E"/>
-                </a:solidFill>
-              </a:rPr>
-              <a:t>•  Restaura snapshot. Carga la muestra en x64dbg con ScyllaHide activo (perfil anti-anti-debug).</a:t>
-            </a:r>
-          </a:p>
-          <a:p>
-            <a:pPr>
-              <a:spcAft>
-                <a:spcPts val="600"/>
-              </a:spcAft>
-            </a:pPr>
-            <a:r>
-              <a:rPr sz="1500">
-                <a:solidFill>
-                  <a:srgbClr val="22282E"/>
-                </a:solidFill>
-              </a:rPr>
-              <a:t>•  Pon un breakpoint en APIs típicas del final del stub (VirtualAlloc, VirtualProtect) para atrapar la escritura del código desempacado.</a:t>
+              <a:t>•  Término — Definición concisa</a:t>
+            </a:r>
+          </a:p>
+          <a:p>
+            <a:pPr>
+              <a:spcAft>
+                <a:spcPts val="600"/>
+              </a:spcAft>
+            </a:pPr>
+            <a:r>
+              <a:rPr sz="1500">
+                <a:solidFill>
+                  <a:srgbClr val="22282E"/>
+                </a:solidFill>
+              </a:rPr>
+              <a:t>•  Packing — Comprimir/cifrar el binario; un stub lo reconstruye</a:t>
+            </a:r>
+          </a:p>
+          <a:p>
+            <a:pPr>
+              <a:spcAft>
+                <a:spcPts val="600"/>
+              </a:spcAft>
+            </a:pPr>
+            <a:r>
+              <a:rPr sz="1500">
+                <a:solidFill>
+                  <a:srgbClr val="22282E"/>
+                </a:solidFill>
+              </a:rPr>
+              <a:t>•  Stub — Desempaquetador que revela el código en ejecución</a:t>
+            </a:r>
+          </a:p>
+          <a:p>
+            <a:pPr>
+              <a:spcAft>
+                <a:spcPts val="600"/>
+              </a:spcAft>
+            </a:pPr>
+            <a:r>
+              <a:rPr sz="1500">
+                <a:solidFill>
+                  <a:srgbClr val="22282E"/>
+                </a:solidFill>
+              </a:rPr>
+              <a:t>•  Ofuscación — Hacer el código ilegible manteniéndolo como código</a:t>
+            </a:r>
+          </a:p>
+          <a:p>
+            <a:pPr>
+              <a:spcAft>
+                <a:spcPts val="600"/>
+              </a:spcAft>
+            </a:pPr>
+            <a:r>
+              <a:rPr sz="1500">
+                <a:solidFill>
+                  <a:srgbClr val="22282E"/>
+                </a:solidFill>
+              </a:rPr>
+              <a:t>•  Virtualización — Traducir a bytecode propio con intérprete</a:t>
+            </a:r>
+          </a:p>
+          <a:p>
+            <a:pPr>
+              <a:spcAft>
+                <a:spcPts val="600"/>
+              </a:spcAft>
+            </a:pPr>
+            <a:r>
+              <a:rPr sz="1500">
+                <a:solidFill>
+                  <a:srgbClr val="22282E"/>
+                </a:solidFill>
+              </a:rPr>
+              <a:t>•  Unpacking — Recuperar el código real del malware empaquetado</a:t>
+            </a:r>
+          </a:p>
+          <a:p>
+            <a:pPr>
+              <a:spcAft>
+                <a:spcPts val="600"/>
+              </a:spcAft>
+            </a:pPr>
+            <a:r>
+              <a:rPr sz="1500">
+                <a:solidFill>
+                  <a:srgbClr val="22282E"/>
+                </a:solidFill>
+              </a:rPr>
+              <a:t>•  DIE / PEiD — Herramientas que identifican el packer</a:t>
             </a:r>
           </a:p>
         </p:txBody>
@@ -4524,7 +4915,7 @@
                   <a:srgbClr val="0B3D2E"/>
                 </a:solidFill>
               </a:rPr>
-              <a:t>✍️ Ejercicios</a:t>
+              <a:t>🧰 Herramientas y preparación</a:t>
             </a:r>
           </a:p>
         </p:txBody>
@@ -4562,82 +4953,52 @@
                   <a:srgbClr val="22282E"/>
                 </a:solidFill>
               </a:rPr>
-              <a:t>•  Explica por qué un binario empaquetado muestra pocos strings e imports.</a:t>
-            </a:r>
-          </a:p>
-          <a:p>
-            <a:pPr>
-              <a:spcAft>
-                <a:spcPts val="600"/>
-              </a:spcAft>
-            </a:pPr>
-            <a:r>
-              <a:rPr sz="1500">
-                <a:solidFill>
-                  <a:srgbClr val="22282E"/>
-                </a:solidFill>
-              </a:rPr>
-              <a:t>•  Compara unpacking automático vs manual: cuándo usar cada uno.</a:t>
-            </a:r>
-          </a:p>
-          <a:p>
-            <a:pPr>
-              <a:spcAft>
-                <a:spcPts val="600"/>
-              </a:spcAft>
-            </a:pPr>
-            <a:r>
-              <a:rPr sz="1500">
-                <a:solidFill>
-                  <a:srgbClr val="22282E"/>
-                </a:solidFill>
-              </a:rPr>
-              <a:t>•  Identifica el OEP en un ejemplo y justifica tu decisión.</a:t>
-            </a:r>
-          </a:p>
-          <a:p>
-            <a:pPr>
-              <a:spcAft>
-                <a:spcPts val="600"/>
-              </a:spcAft>
-            </a:pPr>
-            <a:r>
-              <a:rPr sz="1500">
-                <a:solidFill>
-                  <a:srgbClr val="22282E"/>
-                </a:solidFill>
-              </a:rPr>
-              <a:t>•  Enumera 4 técnicas anti-debug y cómo las neutraliza ScyllaHide.</a:t>
-            </a:r>
-          </a:p>
-          <a:p>
-            <a:pPr>
-              <a:spcAft>
-                <a:spcPts val="600"/>
-              </a:spcAft>
-            </a:pPr>
-            <a:r>
-              <a:rPr sz="1500">
-                <a:solidFill>
-                  <a:srgbClr val="22282E"/>
-                </a:solidFill>
-              </a:rPr>
-              <a:t>•  Reconstruye la IAT de un dump y verifica que Ghidra resuelve nombres.</a:t>
-            </a:r>
-          </a:p>
-          <a:p>
-            <a:pPr>
-              <a:spcAft>
-                <a:spcPts val="600"/>
-              </a:spcAft>
-            </a:pPr>
-            <a:r>
-              <a:rPr sz="1500">
-                <a:solidFill>
-                  <a:srgbClr val="22282E"/>
-                </a:solidFill>
-              </a:rPr>
-              <a:t>•  Investiga por qué VMProtect/Themida requieren otras técnicas.</a:t>
+              <a:t>•  Detect It Easy / PEiD para identificar packer.</a:t>
+            </a:r>
+          </a:p>
+          <a:p>
+            <a:pPr>
+              <a:spcAft>
+                <a:spcPts val="600"/>
+              </a:spcAft>
+            </a:pPr>
+            <a:r>
+              <a:rPr sz="1500">
+                <a:solidFill>
+                  <a:srgbClr val="22282E"/>
+                </a:solidFill>
+              </a:rPr>
+              <a:t>•  UPX (upx -d) para packers conocidos.</a:t>
+            </a:r>
+          </a:p>
+          <a:p>
+            <a:pPr>
+              <a:spcAft>
+                <a:spcPts val="600"/>
+              </a:spcAft>
+            </a:pPr>
+            <a:r>
+              <a:rPr sz="1500">
+                <a:solidFill>
+                  <a:srgbClr val="22282E"/>
+                </a:solidFill>
+              </a:rPr>
+              <a:t>•  x64dbg con plugins Scylla (dump + IAT) y ScyllaHide (anti-anti-debug).</a:t>
+            </a:r>
+          </a:p>
+          <a:p>
+            <a:pPr>
+              <a:spcAft>
+                <a:spcPts val="600"/>
+              </a:spcAft>
+            </a:pPr>
+            <a:r>
+              <a:rPr sz="1500">
+                <a:solidFill>
+                  <a:srgbClr val="22282E"/>
+                </a:solidFill>
+              </a:rPr>
+              <a:t>•  PE-bear para revisar el resultado; Ghidra para continuar el análisis.</a:t>
             </a:r>
           </a:p>
         </p:txBody>
@@ -4688,7 +5049,7 @@
                   <a:srgbClr val="0B3D2E"/>
                 </a:solidFill>
               </a:rPr>
-              <a:t>📝 Reto verificable</a:t>
+              <a:t>🧪 Laboratorio guiado</a:t>
             </a:r>
           </a:p>
         </p:txBody>
@@ -4726,22 +5087,97 @@
                   <a:srgbClr val="22282E"/>
                 </a:solidFill>
               </a:rPr>
-              <a:t>•  Desempaca una muestra empaquetada y entrega el dump reparado con su IAT reconstruida, más un informe con el OEP, el método y evidencia de que el código ya es legible (strings/imports visibles).</a:t>
-            </a:r>
-          </a:p>
-          <a:p>
-            <a:pPr>
-              <a:spcAft>
-                <a:spcPts val="600"/>
-              </a:spcAft>
-            </a:pPr>
-            <a:r>
-              <a:rPr sz="1500">
-                <a:solidFill>
-                  <a:srgbClr val="22282E"/>
-                </a:solidFill>
-              </a:rPr>
-              <a:t>•  Criterio de aceptación: el dump abre en Ghidra mostrando imports resueltos y strings que no eran visibles en el binario original, y el informe indica el OEP con su dirección.</a:t>
+              <a:t>•  Caso A — packer conocido (UPX):</a:t>
+            </a:r>
+          </a:p>
+          <a:p>
+            <a:pPr>
+              <a:spcAft>
+                <a:spcPts val="600"/>
+              </a:spcAft>
+            </a:pPr>
+            <a:r>
+              <a:rPr sz="1500">
+                <a:solidFill>
+                  <a:srgbClr val="22282E"/>
+                </a:solidFill>
+              </a:rPr>
+              <a:t>•  Confirma con DIE que la muestra está empaquetada con UPX.</a:t>
+            </a:r>
+          </a:p>
+          <a:p>
+            <a:pPr>
+              <a:spcAft>
+                <a:spcPts val="600"/>
+              </a:spcAft>
+            </a:pPr>
+            <a:r>
+              <a:rPr sz="1500">
+                <a:solidFill>
+                  <a:srgbClr val="22282E"/>
+                </a:solidFill>
+              </a:rPr>
+              <a:t>•  Desempaca: upx -d muestra.exe -o muestraunpacked.exe.</a:t>
+            </a:r>
+          </a:p>
+          <a:p>
+            <a:pPr>
+              <a:spcAft>
+                <a:spcPts val="600"/>
+              </a:spcAft>
+            </a:pPr>
+            <a:r>
+              <a:rPr sz="1500">
+                <a:solidFill>
+                  <a:srgbClr val="22282E"/>
+                </a:solidFill>
+              </a:rPr>
+              <a:t>•  Verifica en PE-bear que la IAT y las secciones vuelven a ser normales y reanaliza en Ghidra.</a:t>
+            </a:r>
+          </a:p>
+          <a:p>
+            <a:pPr>
+              <a:spcAft>
+                <a:spcPts val="600"/>
+              </a:spcAft>
+            </a:pPr>
+            <a:r>
+              <a:rPr sz="1500">
+                <a:solidFill>
+                  <a:srgbClr val="22282E"/>
+                </a:solidFill>
+              </a:rPr>
+              <a:t>•  Caso B — unpacking manual genérico:</a:t>
+            </a:r>
+          </a:p>
+          <a:p>
+            <a:pPr>
+              <a:spcAft>
+                <a:spcPts val="600"/>
+              </a:spcAft>
+            </a:pPr>
+            <a:r>
+              <a:rPr sz="1500">
+                <a:solidFill>
+                  <a:srgbClr val="22282E"/>
+                </a:solidFill>
+              </a:rPr>
+              <a:t>•  Restaura snapshot. Carga la muestra en x64dbg con ScyllaHide activo (perfil anti-anti-debug).</a:t>
+            </a:r>
+          </a:p>
+          <a:p>
+            <a:pPr>
+              <a:spcAft>
+                <a:spcPts val="600"/>
+              </a:spcAft>
+            </a:pPr>
+            <a:r>
+              <a:rPr sz="1500">
+                <a:solidFill>
+                  <a:srgbClr val="22282E"/>
+                </a:solidFill>
+              </a:rPr>
+              <a:t>•  Pon un breakpoint en APIs típicas del final del stub (VirtualAlloc, VirtualProtect) para atrapar la escritura del código desempacado.</a:t>
             </a:r>
           </a:p>
         </p:txBody>
